--- a/Lecture 1/Python_Lecture1_With_Practice.pptx
+++ b/Lecture 1/Python_Lecture1_With_Practice.pptx
@@ -9016,7 +9016,12 @@
             <p:ph idx="1"/>
           </p:nvPr>
         </p:nvSpPr>
-        <p:spPr/>
+        <p:spPr>
+          <a:xfrm>
+            <a:off x="828436" y="2604597"/>
+            <a:ext cx="6711654" cy="2832973"/>
+          </a:xfrm>
+        </p:spPr>
         <p:txBody>
           <a:bodyPr/>
           <a:lstStyle/>
@@ -9025,7 +9030,24 @@
               <a:defRPr sz="2000"/>
             </a:pPr>
             <a:r>
-              <a:t>Use int(), str() and float() on sample values.</a:t>
+              <a:rPr dirty="0"/>
+              <a:t>Use </a:t>
+            </a:r>
+            <a:r>
+              <a:rPr dirty="0" err="1"/>
+              <a:t>int</a:t>
+            </a:r>
+            <a:r>
+              <a:rPr dirty="0"/>
+              <a:t>(), </a:t>
+            </a:r>
+            <a:r>
+              <a:rPr dirty="0" err="1"/>
+              <a:t>str</a:t>
+            </a:r>
+            <a:r>
+              <a:rPr dirty="0"/>
+              <a:t>() and float() on sample values.</a:t>
             </a:r>
           </a:p>
           <a:p>
@@ -9033,6 +9055,7 @@
               <a:defRPr sz="2000"/>
             </a:pPr>
             <a:r>
+              <a:rPr dirty="0"/>
               <a:t>Try adding '2' + 3 and fix using type casting.</a:t>
             </a:r>
           </a:p>
